--- a/instructor/slides/pptx/lectures/L52.pptx
+++ b/instructor/slides/pptx/lectures/L52.pptx
@@ -4091,8 +4091,8 @@
         </p:nvSpPr>
         <p:spPr>
           <a:xfrm>
-            <a:off x="640080" y="1920240"/>
-            <a:ext cx="10972800" cy="1463040"/>
+            <a:off x="640080" y="1828800"/>
+            <a:ext cx="6675120" cy="1645920"/>
           </a:xfrm>
           <a:prstGeom prst="rect">
             <a:avLst/>
@@ -4106,7 +4106,7 @@
           <a:lstStyle/>
           <a:p>
             <a:r>
-              <a:rPr sz="4400" b="1">
+              <a:rPr sz="4000" b="1">
                 <a:solidFill>
                   <a:srgbClr val="FFFFFF"/>
                 </a:solidFill>
@@ -4125,8 +4125,8 @@
         </p:nvSpPr>
         <p:spPr>
           <a:xfrm>
-            <a:off x="640080" y="3657600"/>
-            <a:ext cx="10789920" cy="1097280"/>
+            <a:off x="640080" y="3794760"/>
+            <a:ext cx="6675120" cy="1097280"/>
           </a:xfrm>
           <a:prstGeom prst="rect">
             <a:avLst/>
@@ -4140,7 +4140,7 @@
           <a:lstStyle/>
           <a:p>
             <a:r>
-              <a:rPr sz="2000" b="0">
+              <a:rPr sz="1800" b="0">
                 <a:solidFill>
                   <a:srgbClr val="B7CBDE"/>
                 </a:solidFill>
@@ -4159,8 +4159,8 @@
         </p:nvSpPr>
         <p:spPr>
           <a:xfrm>
-            <a:off x="640080" y="5029200"/>
-            <a:ext cx="10972800" cy="457200"/>
+            <a:off x="640080" y="5120640"/>
+            <a:ext cx="6766560" cy="457200"/>
           </a:xfrm>
           <a:prstGeom prst="rect">
             <a:avLst/>
@@ -4174,7 +4174,7 @@
           <a:lstStyle/>
           <a:p>
             <a:r>
-              <a:rPr sz="1600" b="0">
+              <a:rPr sz="1500" b="0">
                 <a:solidFill>
                   <a:srgbClr val="3EC6FF"/>
                 </a:solidFill>
@@ -4185,6 +4185,30 @@
           </a:p>
         </p:txBody>
       </p:sp>
+      <p:pic>
+        <p:nvPicPr>
+          <p:cNvPr id="7" name="Picture 6" descr="dw-streaming.jpg"/>
+          <p:cNvPicPr>
+            <a:picLocks noChangeAspect="1"/>
+          </p:cNvPicPr>
+          <p:nvPr/>
+        </p:nvPicPr>
+        <p:blipFill>
+          <a:blip r:embed="rId2"/>
+          <a:stretch>
+            <a:fillRect/>
+          </a:stretch>
+        </p:blipFill>
+        <p:spPr>
+          <a:xfrm>
+            <a:off x="7452360" y="1325880"/>
+            <a:ext cx="4160520" cy="4160520"/>
+          </a:xfrm>
+          <a:prstGeom prst="rect">
+            <a:avLst/>
+          </a:prstGeom>
+        </p:spPr>
+      </p:pic>
     </p:spTree>
   </p:cSld>
   <p:clrMapOvr>
@@ -4288,8 +4312,8 @@
         </p:nvSpPr>
         <p:spPr>
           <a:xfrm>
-            <a:off x="640080" y="685800"/>
-            <a:ext cx="10972800" cy="1463040"/>
+            <a:off x="640080" y="658368"/>
+            <a:ext cx="7863840" cy="1645920"/>
           </a:xfrm>
           <a:prstGeom prst="rect">
             <a:avLst/>
@@ -4303,7 +4327,7 @@
           <a:lstStyle/>
           <a:p>
             <a:r>
-              <a:rPr sz="3200" b="1">
+              <a:rPr sz="3000" b="1">
                 <a:solidFill>
                   <a:srgbClr val="FFFFFF"/>
                 </a:solidFill>
@@ -4322,8 +4346,8 @@
         </p:nvSpPr>
         <p:spPr>
           <a:xfrm>
-            <a:off x="777240" y="2286000"/>
-            <a:ext cx="10607040" cy="4754880"/>
+            <a:off x="777240" y="2331720"/>
+            <a:ext cx="7498079" cy="4754880"/>
           </a:xfrm>
           <a:prstGeom prst="rect">
             <a:avLst/>
@@ -4342,7 +4366,7 @@
               </a:spcAft>
             </a:pPr>
             <a:r>
-              <a:rPr sz="2400" b="0">
+              <a:rPr sz="2200" b="0">
                 <a:solidFill>
                   <a:srgbClr val="FFFFFF"/>
                 </a:solidFill>
@@ -4353,6 +4377,30 @@
           </a:p>
         </p:txBody>
       </p:sp>
+      <p:pic>
+        <p:nvPicPr>
+          <p:cNvPr id="6" name="Picture 5" descr="dw-streaming.jpg"/>
+          <p:cNvPicPr>
+            <a:picLocks noChangeAspect="1"/>
+          </p:cNvPicPr>
+          <p:nvPr/>
+        </p:nvPicPr>
+        <p:blipFill>
+          <a:blip r:embed="rId2"/>
+          <a:stretch>
+            <a:fillRect/>
+          </a:stretch>
+        </p:blipFill>
+        <p:spPr>
+          <a:xfrm>
+            <a:off x="8732520" y="2057400"/>
+            <a:ext cx="2880360" cy="2880360"/>
+          </a:xfrm>
+          <a:prstGeom prst="rect">
+            <a:avLst/>
+          </a:prstGeom>
+        </p:spPr>
+      </p:pic>
     </p:spTree>
   </p:cSld>
   <p:clrMapOvr>
@@ -4456,8 +4504,8 @@
         </p:nvSpPr>
         <p:spPr>
           <a:xfrm>
-            <a:off x="640080" y="685800"/>
-            <a:ext cx="10972800" cy="1463040"/>
+            <a:off x="640080" y="658368"/>
+            <a:ext cx="7863840" cy="1645920"/>
           </a:xfrm>
           <a:prstGeom prst="rect">
             <a:avLst/>
@@ -4471,7 +4519,7 @@
           <a:lstStyle/>
           <a:p>
             <a:r>
-              <a:rPr sz="3200" b="1">
+              <a:rPr sz="3000" b="1">
                 <a:solidFill>
                   <a:srgbClr val="FFFFFF"/>
                 </a:solidFill>
@@ -4490,8 +4538,8 @@
         </p:nvSpPr>
         <p:spPr>
           <a:xfrm>
-            <a:off x="777240" y="2286000"/>
-            <a:ext cx="10607040" cy="4754880"/>
+            <a:off x="777240" y="2331720"/>
+            <a:ext cx="7498079" cy="4754880"/>
           </a:xfrm>
           <a:prstGeom prst="rect">
             <a:avLst/>
@@ -4510,7 +4558,7 @@
               </a:spcAft>
             </a:pPr>
             <a:r>
-              <a:rPr sz="2400" b="0">
+              <a:rPr sz="2200" b="0">
                 <a:solidFill>
                   <a:srgbClr val="FFFFFF"/>
                 </a:solidFill>
@@ -4526,7 +4574,7 @@
               </a:spcAft>
             </a:pPr>
             <a:r>
-              <a:rPr sz="2400" b="0">
+              <a:rPr sz="2200" b="0">
                 <a:solidFill>
                   <a:srgbClr val="FFFFFF"/>
                 </a:solidFill>
@@ -4542,7 +4590,7 @@
               </a:spcAft>
             </a:pPr>
             <a:r>
-              <a:rPr sz="2400" b="0">
+              <a:rPr sz="2200" b="0">
                 <a:solidFill>
                   <a:srgbClr val="FFFFFF"/>
                 </a:solidFill>
@@ -4558,7 +4606,7 @@
               </a:spcAft>
             </a:pPr>
             <a:r>
-              <a:rPr sz="2400" b="0">
+              <a:rPr sz="2200" b="0">
                 <a:solidFill>
                   <a:srgbClr val="FFFFFF"/>
                 </a:solidFill>
@@ -4569,6 +4617,30 @@
           </a:p>
         </p:txBody>
       </p:sp>
+      <p:pic>
+        <p:nvPicPr>
+          <p:cNvPr id="6" name="Picture 5" descr="dw-streaming.jpg"/>
+          <p:cNvPicPr>
+            <a:picLocks noChangeAspect="1"/>
+          </p:cNvPicPr>
+          <p:nvPr/>
+        </p:nvPicPr>
+        <p:blipFill>
+          <a:blip r:embed="rId2"/>
+          <a:stretch>
+            <a:fillRect/>
+          </a:stretch>
+        </p:blipFill>
+        <p:spPr>
+          <a:xfrm>
+            <a:off x="8732520" y="2057400"/>
+            <a:ext cx="2880360" cy="2880360"/>
+          </a:xfrm>
+          <a:prstGeom prst="rect">
+            <a:avLst/>
+          </a:prstGeom>
+        </p:spPr>
+      </p:pic>
     </p:spTree>
   </p:cSld>
   <p:clrMapOvr>
@@ -4672,8 +4744,8 @@
         </p:nvSpPr>
         <p:spPr>
           <a:xfrm>
-            <a:off x="640080" y="685800"/>
-            <a:ext cx="10972800" cy="1463040"/>
+            <a:off x="640080" y="658368"/>
+            <a:ext cx="10972800" cy="1645920"/>
           </a:xfrm>
           <a:prstGeom prst="rect">
             <a:avLst/>
@@ -4687,7 +4759,7 @@
           <a:lstStyle/>
           <a:p>
             <a:r>
-              <a:rPr sz="3200" b="1">
+              <a:rPr sz="3000" b="1">
                 <a:solidFill>
                   <a:srgbClr val="FFFFFF"/>
                 </a:solidFill>
@@ -4873,8 +4945,8 @@
         </p:nvSpPr>
         <p:spPr>
           <a:xfrm>
-            <a:off x="640080" y="685800"/>
-            <a:ext cx="10972800" cy="1463040"/>
+            <a:off x="640080" y="658368"/>
+            <a:ext cx="7863840" cy="1645920"/>
           </a:xfrm>
           <a:prstGeom prst="rect">
             <a:avLst/>
@@ -4888,7 +4960,7 @@
           <a:lstStyle/>
           <a:p>
             <a:r>
-              <a:rPr sz="3200" b="1">
+              <a:rPr sz="3000" b="1">
                 <a:solidFill>
                   <a:srgbClr val="FFFFFF"/>
                 </a:solidFill>
@@ -4907,8 +4979,8 @@
         </p:nvSpPr>
         <p:spPr>
           <a:xfrm>
-            <a:off x="777240" y="2286000"/>
-            <a:ext cx="10607040" cy="4754880"/>
+            <a:off x="777240" y="2331720"/>
+            <a:ext cx="7498079" cy="4754880"/>
           </a:xfrm>
           <a:prstGeom prst="rect">
             <a:avLst/>
@@ -4927,7 +4999,7 @@
               </a:spcAft>
             </a:pPr>
             <a:r>
-              <a:rPr sz="2400" b="0">
+              <a:rPr sz="2200" b="0">
                 <a:solidFill>
                   <a:srgbClr val="FFFFFF"/>
                 </a:solidFill>
@@ -4943,7 +5015,7 @@
               </a:spcAft>
             </a:pPr>
             <a:r>
-              <a:rPr sz="2400" b="0">
+              <a:rPr sz="2200" b="0">
                 <a:solidFill>
                   <a:srgbClr val="FFFFFF"/>
                 </a:solidFill>
@@ -4959,7 +5031,7 @@
               </a:spcAft>
             </a:pPr>
             <a:r>
-              <a:rPr sz="2400" b="0">
+              <a:rPr sz="2200" b="0">
                 <a:solidFill>
                   <a:srgbClr val="FFFFFF"/>
                 </a:solidFill>
@@ -4975,7 +5047,7 @@
               </a:spcAft>
             </a:pPr>
             <a:r>
-              <a:rPr sz="2400" b="0">
+              <a:rPr sz="2200" b="0">
                 <a:solidFill>
                   <a:srgbClr val="FFFFFF"/>
                 </a:solidFill>
@@ -4986,6 +5058,30 @@
           </a:p>
         </p:txBody>
       </p:sp>
+      <p:pic>
+        <p:nvPicPr>
+          <p:cNvPr id="6" name="Picture 5" descr="dw-interview.jpg"/>
+          <p:cNvPicPr>
+            <a:picLocks noChangeAspect="1"/>
+          </p:cNvPicPr>
+          <p:nvPr/>
+        </p:nvPicPr>
+        <p:blipFill>
+          <a:blip r:embed="rId2"/>
+          <a:stretch>
+            <a:fillRect/>
+          </a:stretch>
+        </p:blipFill>
+        <p:spPr>
+          <a:xfrm>
+            <a:off x="8732520" y="2057400"/>
+            <a:ext cx="2880360" cy="2880360"/>
+          </a:xfrm>
+          <a:prstGeom prst="rect">
+            <a:avLst/>
+          </a:prstGeom>
+        </p:spPr>
+      </p:pic>
     </p:spTree>
   </p:cSld>
   <p:clrMapOvr>
@@ -5089,8 +5185,8 @@
         </p:nvSpPr>
         <p:spPr>
           <a:xfrm>
-            <a:off x="640080" y="685800"/>
-            <a:ext cx="10972800" cy="1463040"/>
+            <a:off x="640080" y="658368"/>
+            <a:ext cx="7863840" cy="1645920"/>
           </a:xfrm>
           <a:prstGeom prst="rect">
             <a:avLst/>
@@ -5104,7 +5200,7 @@
           <a:lstStyle/>
           <a:p>
             <a:r>
-              <a:rPr sz="3200" b="1">
+              <a:rPr sz="3000" b="1">
                 <a:solidFill>
                   <a:srgbClr val="FFFFFF"/>
                 </a:solidFill>
@@ -5123,8 +5219,8 @@
         </p:nvSpPr>
         <p:spPr>
           <a:xfrm>
-            <a:off x="777240" y="2286000"/>
-            <a:ext cx="10607040" cy="4754880"/>
+            <a:off x="777240" y="2331720"/>
+            <a:ext cx="7498079" cy="4754880"/>
           </a:xfrm>
           <a:prstGeom prst="rect">
             <a:avLst/>
@@ -5143,7 +5239,7 @@
               </a:spcAft>
             </a:pPr>
             <a:r>
-              <a:rPr sz="2400" b="0">
+              <a:rPr sz="2200" b="0">
                 <a:solidFill>
                   <a:srgbClr val="FFFFFF"/>
                 </a:solidFill>
@@ -5159,7 +5255,7 @@
               </a:spcAft>
             </a:pPr>
             <a:r>
-              <a:rPr sz="2400" b="0">
+              <a:rPr sz="2200" b="0">
                 <a:solidFill>
                   <a:srgbClr val="FFFFFF"/>
                 </a:solidFill>
@@ -5175,7 +5271,7 @@
               </a:spcAft>
             </a:pPr>
             <a:r>
-              <a:rPr sz="2400" b="0">
+              <a:rPr sz="2200" b="0">
                 <a:solidFill>
                   <a:srgbClr val="FFFFFF"/>
                 </a:solidFill>
@@ -5191,7 +5287,7 @@
               </a:spcAft>
             </a:pPr>
             <a:r>
-              <a:rPr sz="2400" b="0">
+              <a:rPr sz="2200" b="0">
                 <a:solidFill>
                   <a:srgbClr val="FFFFFF"/>
                 </a:solidFill>
@@ -5202,6 +5298,30 @@
           </a:p>
         </p:txBody>
       </p:sp>
+      <p:pic>
+        <p:nvPicPr>
+          <p:cNvPr id="6" name="Picture 5" descr="dw-interview.jpg"/>
+          <p:cNvPicPr>
+            <a:picLocks noChangeAspect="1"/>
+          </p:cNvPicPr>
+          <p:nvPr/>
+        </p:nvPicPr>
+        <p:blipFill>
+          <a:blip r:embed="rId2"/>
+          <a:stretch>
+            <a:fillRect/>
+          </a:stretch>
+        </p:blipFill>
+        <p:spPr>
+          <a:xfrm>
+            <a:off x="8732520" y="2057400"/>
+            <a:ext cx="2880360" cy="2880360"/>
+          </a:xfrm>
+          <a:prstGeom prst="rect">
+            <a:avLst/>
+          </a:prstGeom>
+        </p:spPr>
+      </p:pic>
     </p:spTree>
   </p:cSld>
   <p:clrMapOvr>
@@ -5305,8 +5425,8 @@
         </p:nvSpPr>
         <p:spPr>
           <a:xfrm>
-            <a:off x="640080" y="685800"/>
-            <a:ext cx="10972800" cy="1463040"/>
+            <a:off x="640080" y="658368"/>
+            <a:ext cx="7863840" cy="1645920"/>
           </a:xfrm>
           <a:prstGeom prst="rect">
             <a:avLst/>
@@ -5320,7 +5440,7 @@
           <a:lstStyle/>
           <a:p>
             <a:r>
-              <a:rPr sz="3200" b="1">
+              <a:rPr sz="3000" b="1">
                 <a:solidFill>
                   <a:srgbClr val="FFFFFF"/>
                 </a:solidFill>
@@ -5339,8 +5459,8 @@
         </p:nvSpPr>
         <p:spPr>
           <a:xfrm>
-            <a:off x="777240" y="2286000"/>
-            <a:ext cx="10607040" cy="4754880"/>
+            <a:off x="777240" y="2331720"/>
+            <a:ext cx="7498079" cy="4754880"/>
           </a:xfrm>
           <a:prstGeom prst="rect">
             <a:avLst/>
@@ -5359,7 +5479,7 @@
               </a:spcAft>
             </a:pPr>
             <a:r>
-              <a:rPr sz="2400" b="0">
+              <a:rPr sz="2200" b="0">
                 <a:solidFill>
                   <a:srgbClr val="FFFFFF"/>
                 </a:solidFill>
@@ -5375,7 +5495,7 @@
               </a:spcAft>
             </a:pPr>
             <a:r>
-              <a:rPr sz="2400" b="0">
+              <a:rPr sz="2200" b="0">
                 <a:solidFill>
                   <a:srgbClr val="FFFFFF"/>
                 </a:solidFill>
@@ -5386,6 +5506,30 @@
           </a:p>
         </p:txBody>
       </p:sp>
+      <p:pic>
+        <p:nvPicPr>
+          <p:cNvPr id="6" name="Picture 5" descr="dw-streaming.jpg"/>
+          <p:cNvPicPr>
+            <a:picLocks noChangeAspect="1"/>
+          </p:cNvPicPr>
+          <p:nvPr/>
+        </p:nvPicPr>
+        <p:blipFill>
+          <a:blip r:embed="rId2"/>
+          <a:stretch>
+            <a:fillRect/>
+          </a:stretch>
+        </p:blipFill>
+        <p:spPr>
+          <a:xfrm>
+            <a:off x="8732520" y="2057400"/>
+            <a:ext cx="2880360" cy="2880360"/>
+          </a:xfrm>
+          <a:prstGeom prst="rect">
+            <a:avLst/>
+          </a:prstGeom>
+        </p:spPr>
+      </p:pic>
     </p:spTree>
   </p:cSld>
   <p:clrMapOvr>
@@ -5489,8 +5633,8 @@
         </p:nvSpPr>
         <p:spPr>
           <a:xfrm>
-            <a:off x="640080" y="685800"/>
-            <a:ext cx="10972800" cy="1463040"/>
+            <a:off x="640080" y="658368"/>
+            <a:ext cx="10972800" cy="1645920"/>
           </a:xfrm>
           <a:prstGeom prst="rect">
             <a:avLst/>
@@ -5504,7 +5648,7 @@
           <a:lstStyle/>
           <a:p>
             <a:r>
-              <a:rPr sz="3200" b="1">
+              <a:rPr sz="3000" b="1">
                 <a:solidFill>
                   <a:srgbClr val="FFFFFF"/>
                 </a:solidFill>
@@ -5802,8 +5946,8 @@
         </p:nvSpPr>
         <p:spPr>
           <a:xfrm>
-            <a:off x="640080" y="685800"/>
-            <a:ext cx="10972800" cy="1463040"/>
+            <a:off x="640080" y="658368"/>
+            <a:ext cx="7863840" cy="1645920"/>
           </a:xfrm>
           <a:prstGeom prst="rect">
             <a:avLst/>
@@ -5817,7 +5961,7 @@
           <a:lstStyle/>
           <a:p>
             <a:r>
-              <a:rPr sz="3200" b="1">
+              <a:rPr sz="3000" b="1">
                 <a:solidFill>
                   <a:srgbClr val="FFFFFF"/>
                 </a:solidFill>
@@ -5836,8 +5980,8 @@
         </p:nvSpPr>
         <p:spPr>
           <a:xfrm>
-            <a:off x="777240" y="2286000"/>
-            <a:ext cx="10607040" cy="4754880"/>
+            <a:off x="777240" y="2331720"/>
+            <a:ext cx="7498079" cy="4754880"/>
           </a:xfrm>
           <a:prstGeom prst="rect">
             <a:avLst/>
@@ -5856,7 +6000,7 @@
               </a:spcAft>
             </a:pPr>
             <a:r>
-              <a:rPr sz="2400" b="0">
+              <a:rPr sz="2200" b="0">
                 <a:solidFill>
                   <a:srgbClr val="FFFFFF"/>
                 </a:solidFill>
@@ -5867,6 +6011,30 @@
           </a:p>
         </p:txBody>
       </p:sp>
+      <p:pic>
+        <p:nvPicPr>
+          <p:cNvPr id="6" name="Picture 5" descr="dw-streaming.jpg"/>
+          <p:cNvPicPr>
+            <a:picLocks noChangeAspect="1"/>
+          </p:cNvPicPr>
+          <p:nvPr/>
+        </p:nvPicPr>
+        <p:blipFill>
+          <a:blip r:embed="rId2"/>
+          <a:stretch>
+            <a:fillRect/>
+          </a:stretch>
+        </p:blipFill>
+        <p:spPr>
+          <a:xfrm>
+            <a:off x="8732520" y="2057400"/>
+            <a:ext cx="2880360" cy="2880360"/>
+          </a:xfrm>
+          <a:prstGeom prst="rect">
+            <a:avLst/>
+          </a:prstGeom>
+        </p:spPr>
+      </p:pic>
     </p:spTree>
   </p:cSld>
   <p:clrMapOvr>
